--- a/material/[SeSAC_YDP_6] 04_1_Javascript.pptx
+++ b/material/[SeSAC_YDP_6] 04_1_Javascript.pptx
@@ -237,7 +237,7 @@
           <a:p>
             <a:fld id="{2EF3F159-7250-4DD4-91C2-13B35D56E1AF}" type="datetimeFigureOut">
               <a:rPr lang="ko-KR" altLang="en-US" smtClean="0"/>
-              <a:t>2024-05-27</a:t>
+              <a:t>2024-05-28</a:t>
             </a:fld>
             <a:endParaRPr lang="ko-KR" altLang="en-US"/>
           </a:p>
@@ -5942,6 +5942,29 @@
             <a:r>
               <a:rPr lang="en-US" altLang="ko-KR" dirty="0"/>
               <a:t>https://www.inflearn.com/pages/infmation-69-20240509</a:t>
+            </a:r>
+          </a:p>
+          <a:p>
+            <a:endParaRPr lang="en-US" altLang="ko-KR" dirty="0"/>
+          </a:p>
+          <a:p>
+            <a:r>
+              <a:rPr lang="ko-KR" altLang="en-US" dirty="0"/>
+              <a:t>글 한번 읽어보세요</a:t>
+            </a:r>
+            <a:r>
+              <a:rPr lang="en-US" altLang="ko-KR" dirty="0"/>
+              <a:t>~ </a:t>
+            </a:r>
+            <a:r>
+              <a:rPr lang="ko-KR" altLang="en-US" dirty="0"/>
+              <a:t>나중에 </a:t>
+            </a:r>
+            <a:r>
+              <a:rPr lang="en-US" altLang="ko-KR" dirty="0">
+                <a:sym typeface="Wingdings" panose="05000000000000000000" pitchFamily="2" charset="2"/>
+              </a:rPr>
+              <a:t></a:t>
             </a:r>
             <a:endParaRPr lang="ko-KR" altLang="en-US" dirty="0"/>
           </a:p>
@@ -15541,7 +15564,7 @@
           <a:p>
             <a:fld id="{0F78D9C4-20C1-4B15-A116-16DC77AD9A1E}" type="datetime1">
               <a:rPr lang="ko-KR" altLang="en-US" smtClean="0"/>
-              <a:t>2024-05-27</a:t>
+              <a:t>2024-05-28</a:t>
             </a:fld>
             <a:endParaRPr lang="ko-KR" altLang="en-US"/>
           </a:p>
@@ -15708,7 +15731,7 @@
           <a:p>
             <a:fld id="{0F78D9C4-20C1-4B15-A116-16DC77AD9A1E}" type="datetime1">
               <a:rPr lang="ko-KR" altLang="en-US" smtClean="0"/>
-              <a:t>2024-05-27</a:t>
+              <a:t>2024-05-28</a:t>
             </a:fld>
             <a:endParaRPr lang="ko-KR" altLang="en-US"/>
           </a:p>
@@ -16236,7 +16259,7 @@
           <a:p>
             <a:fld id="{0F78D9C4-20C1-4B15-A116-16DC77AD9A1E}" type="datetime1">
               <a:rPr lang="ko-KR" altLang="en-US" smtClean="0"/>
-              <a:t>2024-05-27</a:t>
+              <a:t>2024-05-28</a:t>
             </a:fld>
             <a:endParaRPr lang="ko-KR" altLang="en-US"/>
           </a:p>
@@ -19468,7 +19491,7 @@
           <a:p>
             <a:fld id="{0F78D9C4-20C1-4B15-A116-16DC77AD9A1E}" type="datetime1">
               <a:rPr lang="ko-KR" altLang="en-US" smtClean="0"/>
-              <a:t>2024-05-27</a:t>
+              <a:t>2024-05-28</a:t>
             </a:fld>
             <a:endParaRPr lang="ko-KR" altLang="en-US"/>
           </a:p>
@@ -19930,7 +19953,7 @@
           <a:p>
             <a:fld id="{0F78D9C4-20C1-4B15-A116-16DC77AD9A1E}" type="datetime1">
               <a:rPr lang="ko-KR" altLang="en-US" smtClean="0"/>
-              <a:t>2024-05-27</a:t>
+              <a:t>2024-05-28</a:t>
             </a:fld>
             <a:endParaRPr lang="ko-KR" altLang="en-US"/>
           </a:p>
